--- a/deck/saida/conteudo.pptx
+++ b/deck/saida/conteudo.pptx
@@ -785,7 +785,7 @@
               <a:rPr lang="en-US" dirty="0"/>
               <a:t>Mensagem: quatro passos levam do alinhamento à primeira rodada com teste A/B.
 Pontos a confirmar: datas, responsáveis e contatos.
-[Sources] Arquitetura proposta v4, aba 6.</a:t>
+[Sources] Arquitetura proposta v4, aba 4.</a:t>
             </a:r>
             <a:endParaRPr lang="en-US" dirty="0"/>
           </a:p>
@@ -8077,7 +8077,7 @@
                 <a:ea typeface="Lato Black" pitchFamily="34" charset="-122"/>
                 <a:cs typeface="Lato Black" pitchFamily="34" charset="-120"/>
               </a:rPr>
-              <a:t>Controle na AWS</a:t>
+              <a:t>Piso em SQL</a:t>
             </a:r>
             <a:endParaRPr lang="en-US" sz="2400" dirty="0"/>
           </a:p>
@@ -8116,7 +8116,7 @@
                 <a:ea typeface="Lato" pitchFamily="34" charset="-122"/>
                 <a:cs typeface="Lato" pitchFamily="34" charset="-120"/>
               </a:rPr>
-              <a:t>Desenho 2: sorteio, medição e painel também na AWS</a:t>
+              <a:t>regras de cesta e popularidade no Snowflake, se o Personalize não confirmar a cesta</a:t>
             </a:r>
             <a:endParaRPr lang="en-US" sz="1200" dirty="0"/>
           </a:p>
@@ -22322,7 +22322,7 @@
                 <a:ea typeface="Lato" pitchFamily="34" charset="-122"/>
                 <a:cs typeface="Lato" pitchFamily="34" charset="-120"/>
               </a:rPr>
-              <a:t>Detalhe na aba 5 do diagrama de arquitetura</a:t>
+              <a:t>Detalhe na aba 3 do diagrama de arquitetura</a:t>
             </a:r>
             <a:endParaRPr lang="en-US" sz="1013" dirty="0"/>
           </a:p>
